--- a/15齊來頌揚.pptx
+++ b/15齊來頌揚.pptx
@@ -167,7 +167,7 @@
           <a:lstStyle/>
           <a:p>
             <a:r>
-              <a:rPr lang="en-US" altLang="zh-TW" smtClean="0"/>
+              <a:rPr lang="en-US" altLang="zh-TW"/>
               <a:t>Click to edit Master title style</a:t>
             </a:r>
             <a:endParaRPr lang="zh-TW" altLang="en-US"/>
@@ -286,7 +286,7 @@
           </a:lstStyle>
           <a:p>
             <a:r>
-              <a:rPr lang="en-US" altLang="zh-TW" smtClean="0"/>
+              <a:rPr lang="en-US" altLang="zh-TW"/>
               <a:t>Click to edit Master subtitle style</a:t>
             </a:r>
             <a:endParaRPr lang="zh-TW" altLang="en-US"/>
@@ -311,7 +311,7 @@
             <a:fld id="{86B5546F-C09B-4E63-ABC5-F7C86A7E8D66}" type="datetimeFigureOut">
               <a:rPr lang="en-US" smtClean="0"/>
               <a:pPr/>
-              <a:t>6/3/2021</a:t>
+              <a:t>2/27/2026</a:t>
             </a:fld>
             <a:endParaRPr lang="en-US"/>
           </a:p>
@@ -406,7 +406,7 @@
           <a:lstStyle/>
           <a:p>
             <a:r>
-              <a:rPr lang="en-US" altLang="zh-TW" smtClean="0"/>
+              <a:rPr lang="en-US" altLang="zh-TW"/>
               <a:t>Click to edit Master title style</a:t>
             </a:r>
             <a:endParaRPr lang="zh-TW" altLang="en-US"/>
@@ -430,35 +430,35 @@
           <a:p>
             <a:pPr lvl="0"/>
             <a:r>
-              <a:rPr lang="en-US" altLang="zh-TW" smtClean="0"/>
+              <a:rPr lang="en-US" altLang="zh-TW"/>
               <a:t>Edit Master text styles</a:t>
             </a:r>
           </a:p>
           <a:p>
             <a:pPr lvl="1"/>
             <a:r>
-              <a:rPr lang="en-US" altLang="zh-TW" smtClean="0"/>
+              <a:rPr lang="en-US" altLang="zh-TW"/>
               <a:t>Second level</a:t>
             </a:r>
           </a:p>
           <a:p>
             <a:pPr lvl="2"/>
             <a:r>
-              <a:rPr lang="en-US" altLang="zh-TW" smtClean="0"/>
+              <a:rPr lang="en-US" altLang="zh-TW"/>
               <a:t>Third level</a:t>
             </a:r>
           </a:p>
           <a:p>
             <a:pPr lvl="3"/>
             <a:r>
-              <a:rPr lang="en-US" altLang="zh-TW" smtClean="0"/>
+              <a:rPr lang="en-US" altLang="zh-TW"/>
               <a:t>Fourth level</a:t>
             </a:r>
           </a:p>
           <a:p>
             <a:pPr lvl="4"/>
             <a:r>
-              <a:rPr lang="en-US" altLang="zh-TW" smtClean="0"/>
+              <a:rPr lang="en-US" altLang="zh-TW"/>
               <a:t>Fifth level</a:t>
             </a:r>
             <a:endParaRPr lang="zh-TW" altLang="en-US"/>
@@ -483,7 +483,7 @@
             <a:fld id="{86B5546F-C09B-4E63-ABC5-F7C86A7E8D66}" type="datetimeFigureOut">
               <a:rPr lang="en-US" smtClean="0"/>
               <a:pPr/>
-              <a:t>6/3/2021</a:t>
+              <a:t>2/27/2026</a:t>
             </a:fld>
             <a:endParaRPr lang="en-US"/>
           </a:p>
@@ -583,7 +583,7 @@
           <a:lstStyle/>
           <a:p>
             <a:r>
-              <a:rPr lang="en-US" altLang="zh-TW" smtClean="0"/>
+              <a:rPr lang="en-US" altLang="zh-TW"/>
               <a:t>Click to edit Master title style</a:t>
             </a:r>
             <a:endParaRPr lang="zh-TW" altLang="en-US"/>
@@ -612,35 +612,35 @@
           <a:p>
             <a:pPr lvl="0"/>
             <a:r>
-              <a:rPr lang="en-US" altLang="zh-TW" smtClean="0"/>
+              <a:rPr lang="en-US" altLang="zh-TW"/>
               <a:t>Edit Master text styles</a:t>
             </a:r>
           </a:p>
           <a:p>
             <a:pPr lvl="1"/>
             <a:r>
-              <a:rPr lang="en-US" altLang="zh-TW" smtClean="0"/>
+              <a:rPr lang="en-US" altLang="zh-TW"/>
               <a:t>Second level</a:t>
             </a:r>
           </a:p>
           <a:p>
             <a:pPr lvl="2"/>
             <a:r>
-              <a:rPr lang="en-US" altLang="zh-TW" smtClean="0"/>
+              <a:rPr lang="en-US" altLang="zh-TW"/>
               <a:t>Third level</a:t>
             </a:r>
           </a:p>
           <a:p>
             <a:pPr lvl="3"/>
             <a:r>
-              <a:rPr lang="en-US" altLang="zh-TW" smtClean="0"/>
+              <a:rPr lang="en-US" altLang="zh-TW"/>
               <a:t>Fourth level</a:t>
             </a:r>
           </a:p>
           <a:p>
             <a:pPr lvl="4"/>
             <a:r>
-              <a:rPr lang="en-US" altLang="zh-TW" smtClean="0"/>
+              <a:rPr lang="en-US" altLang="zh-TW"/>
               <a:t>Fifth level</a:t>
             </a:r>
             <a:endParaRPr lang="zh-TW" altLang="en-US"/>
@@ -665,7 +665,7 @@
             <a:fld id="{86B5546F-C09B-4E63-ABC5-F7C86A7E8D66}" type="datetimeFigureOut">
               <a:rPr lang="en-US" smtClean="0"/>
               <a:pPr/>
-              <a:t>6/3/2021</a:t>
+              <a:t>2/27/2026</a:t>
             </a:fld>
             <a:endParaRPr lang="en-US"/>
           </a:p>
@@ -760,7 +760,7 @@
           <a:lstStyle/>
           <a:p>
             <a:r>
-              <a:rPr lang="en-US" altLang="zh-TW" smtClean="0"/>
+              <a:rPr lang="en-US" altLang="zh-TW"/>
               <a:t>Click to edit Master title style</a:t>
             </a:r>
             <a:endParaRPr lang="zh-TW" altLang="en-US"/>
@@ -784,35 +784,35 @@
           <a:p>
             <a:pPr lvl="0"/>
             <a:r>
-              <a:rPr lang="en-US" altLang="zh-TW" smtClean="0"/>
+              <a:rPr lang="en-US" altLang="zh-TW"/>
               <a:t>Edit Master text styles</a:t>
             </a:r>
           </a:p>
           <a:p>
             <a:pPr lvl="1"/>
             <a:r>
-              <a:rPr lang="en-US" altLang="zh-TW" smtClean="0"/>
+              <a:rPr lang="en-US" altLang="zh-TW"/>
               <a:t>Second level</a:t>
             </a:r>
           </a:p>
           <a:p>
             <a:pPr lvl="2"/>
             <a:r>
-              <a:rPr lang="en-US" altLang="zh-TW" smtClean="0"/>
+              <a:rPr lang="en-US" altLang="zh-TW"/>
               <a:t>Third level</a:t>
             </a:r>
           </a:p>
           <a:p>
             <a:pPr lvl="3"/>
             <a:r>
-              <a:rPr lang="en-US" altLang="zh-TW" smtClean="0"/>
+              <a:rPr lang="en-US" altLang="zh-TW"/>
               <a:t>Fourth level</a:t>
             </a:r>
           </a:p>
           <a:p>
             <a:pPr lvl="4"/>
             <a:r>
-              <a:rPr lang="en-US" altLang="zh-TW" smtClean="0"/>
+              <a:rPr lang="en-US" altLang="zh-TW"/>
               <a:t>Fifth level</a:t>
             </a:r>
             <a:endParaRPr lang="zh-TW" altLang="en-US"/>
@@ -837,7 +837,7 @@
             <a:fld id="{86B5546F-C09B-4E63-ABC5-F7C86A7E8D66}" type="datetimeFigureOut">
               <a:rPr lang="en-US" smtClean="0"/>
               <a:pPr/>
-              <a:t>6/3/2021</a:t>
+              <a:t>2/27/2026</a:t>
             </a:fld>
             <a:endParaRPr lang="en-US"/>
           </a:p>
@@ -941,7 +941,7 @@
           </a:lstStyle>
           <a:p>
             <a:r>
-              <a:rPr lang="en-US" altLang="zh-TW" smtClean="0"/>
+              <a:rPr lang="en-US" altLang="zh-TW"/>
               <a:t>Click to edit Master title style</a:t>
             </a:r>
             <a:endParaRPr lang="zh-TW" altLang="en-US"/>
@@ -1061,7 +1061,7 @@
           <a:p>
             <a:pPr lvl="0"/>
             <a:r>
-              <a:rPr lang="en-US" altLang="zh-TW" smtClean="0"/>
+              <a:rPr lang="en-US" altLang="zh-TW"/>
               <a:t>Edit Master text styles</a:t>
             </a:r>
           </a:p>
@@ -1085,7 +1085,7 @@
             <a:fld id="{86B5546F-C09B-4E63-ABC5-F7C86A7E8D66}" type="datetimeFigureOut">
               <a:rPr lang="en-US" smtClean="0"/>
               <a:pPr/>
-              <a:t>6/3/2021</a:t>
+              <a:t>2/27/2026</a:t>
             </a:fld>
             <a:endParaRPr lang="en-US"/>
           </a:p>
@@ -1180,7 +1180,7 @@
           <a:lstStyle/>
           <a:p>
             <a:r>
-              <a:rPr lang="en-US" altLang="zh-TW" smtClean="0"/>
+              <a:rPr lang="en-US" altLang="zh-TW"/>
               <a:t>Click to edit Master title style</a:t>
             </a:r>
             <a:endParaRPr lang="zh-TW" altLang="en-US"/>
@@ -1237,35 +1237,35 @@
           <a:p>
             <a:pPr lvl="0"/>
             <a:r>
-              <a:rPr lang="en-US" altLang="zh-TW" smtClean="0"/>
+              <a:rPr lang="en-US" altLang="zh-TW"/>
               <a:t>Edit Master text styles</a:t>
             </a:r>
           </a:p>
           <a:p>
             <a:pPr lvl="1"/>
             <a:r>
-              <a:rPr lang="en-US" altLang="zh-TW" smtClean="0"/>
+              <a:rPr lang="en-US" altLang="zh-TW"/>
               <a:t>Second level</a:t>
             </a:r>
           </a:p>
           <a:p>
             <a:pPr lvl="2"/>
             <a:r>
-              <a:rPr lang="en-US" altLang="zh-TW" smtClean="0"/>
+              <a:rPr lang="en-US" altLang="zh-TW"/>
               <a:t>Third level</a:t>
             </a:r>
           </a:p>
           <a:p>
             <a:pPr lvl="3"/>
             <a:r>
-              <a:rPr lang="en-US" altLang="zh-TW" smtClean="0"/>
+              <a:rPr lang="en-US" altLang="zh-TW"/>
               <a:t>Fourth level</a:t>
             </a:r>
           </a:p>
           <a:p>
             <a:pPr lvl="4"/>
             <a:r>
-              <a:rPr lang="en-US" altLang="zh-TW" smtClean="0"/>
+              <a:rPr lang="en-US" altLang="zh-TW"/>
               <a:t>Fifth level</a:t>
             </a:r>
             <a:endParaRPr lang="zh-TW" altLang="en-US"/>
@@ -1322,35 +1322,35 @@
           <a:p>
             <a:pPr lvl="0"/>
             <a:r>
-              <a:rPr lang="en-US" altLang="zh-TW" smtClean="0"/>
+              <a:rPr lang="en-US" altLang="zh-TW"/>
               <a:t>Edit Master text styles</a:t>
             </a:r>
           </a:p>
           <a:p>
             <a:pPr lvl="1"/>
             <a:r>
-              <a:rPr lang="en-US" altLang="zh-TW" smtClean="0"/>
+              <a:rPr lang="en-US" altLang="zh-TW"/>
               <a:t>Second level</a:t>
             </a:r>
           </a:p>
           <a:p>
             <a:pPr lvl="2"/>
             <a:r>
-              <a:rPr lang="en-US" altLang="zh-TW" smtClean="0"/>
+              <a:rPr lang="en-US" altLang="zh-TW"/>
               <a:t>Third level</a:t>
             </a:r>
           </a:p>
           <a:p>
             <a:pPr lvl="3"/>
             <a:r>
-              <a:rPr lang="en-US" altLang="zh-TW" smtClean="0"/>
+              <a:rPr lang="en-US" altLang="zh-TW"/>
               <a:t>Fourth level</a:t>
             </a:r>
           </a:p>
           <a:p>
             <a:pPr lvl="4"/>
             <a:r>
-              <a:rPr lang="en-US" altLang="zh-TW" smtClean="0"/>
+              <a:rPr lang="en-US" altLang="zh-TW"/>
               <a:t>Fifth level</a:t>
             </a:r>
             <a:endParaRPr lang="zh-TW" altLang="en-US"/>
@@ -1375,7 +1375,7 @@
             <a:fld id="{86B5546F-C09B-4E63-ABC5-F7C86A7E8D66}" type="datetimeFigureOut">
               <a:rPr lang="en-US" smtClean="0"/>
               <a:pPr/>
-              <a:t>6/3/2021</a:t>
+              <a:t>2/27/2026</a:t>
             </a:fld>
             <a:endParaRPr lang="en-US"/>
           </a:p>
@@ -1474,7 +1474,7 @@
           </a:lstStyle>
           <a:p>
             <a:r>
-              <a:rPr lang="en-US" altLang="zh-TW" smtClean="0"/>
+              <a:rPr lang="en-US" altLang="zh-TW"/>
               <a:t>Click to edit Master title style</a:t>
             </a:r>
             <a:endParaRPr lang="zh-TW" altLang="en-US"/>
@@ -1540,7 +1540,7 @@
           <a:p>
             <a:pPr lvl="0"/>
             <a:r>
-              <a:rPr lang="en-US" altLang="zh-TW" smtClean="0"/>
+              <a:rPr lang="en-US" altLang="zh-TW"/>
               <a:t>Edit Master text styles</a:t>
             </a:r>
           </a:p>
@@ -1596,35 +1596,35 @@
           <a:p>
             <a:pPr lvl="0"/>
             <a:r>
-              <a:rPr lang="en-US" altLang="zh-TW" smtClean="0"/>
+              <a:rPr lang="en-US" altLang="zh-TW"/>
               <a:t>Edit Master text styles</a:t>
             </a:r>
           </a:p>
           <a:p>
             <a:pPr lvl="1"/>
             <a:r>
-              <a:rPr lang="en-US" altLang="zh-TW" smtClean="0"/>
+              <a:rPr lang="en-US" altLang="zh-TW"/>
               <a:t>Second level</a:t>
             </a:r>
           </a:p>
           <a:p>
             <a:pPr lvl="2"/>
             <a:r>
-              <a:rPr lang="en-US" altLang="zh-TW" smtClean="0"/>
+              <a:rPr lang="en-US" altLang="zh-TW"/>
               <a:t>Third level</a:t>
             </a:r>
           </a:p>
           <a:p>
             <a:pPr lvl="3"/>
             <a:r>
-              <a:rPr lang="en-US" altLang="zh-TW" smtClean="0"/>
+              <a:rPr lang="en-US" altLang="zh-TW"/>
               <a:t>Fourth level</a:t>
             </a:r>
           </a:p>
           <a:p>
             <a:pPr lvl="4"/>
             <a:r>
-              <a:rPr lang="en-US" altLang="zh-TW" smtClean="0"/>
+              <a:rPr lang="en-US" altLang="zh-TW"/>
               <a:t>Fifth level</a:t>
             </a:r>
             <a:endParaRPr lang="zh-TW" altLang="en-US"/>
@@ -1690,7 +1690,7 @@
           <a:p>
             <a:pPr lvl="0"/>
             <a:r>
-              <a:rPr lang="en-US" altLang="zh-TW" smtClean="0"/>
+              <a:rPr lang="en-US" altLang="zh-TW"/>
               <a:t>Edit Master text styles</a:t>
             </a:r>
           </a:p>
@@ -1746,35 +1746,35 @@
           <a:p>
             <a:pPr lvl="0"/>
             <a:r>
-              <a:rPr lang="en-US" altLang="zh-TW" smtClean="0"/>
+              <a:rPr lang="en-US" altLang="zh-TW"/>
               <a:t>Edit Master text styles</a:t>
             </a:r>
           </a:p>
           <a:p>
             <a:pPr lvl="1"/>
             <a:r>
-              <a:rPr lang="en-US" altLang="zh-TW" smtClean="0"/>
+              <a:rPr lang="en-US" altLang="zh-TW"/>
               <a:t>Second level</a:t>
             </a:r>
           </a:p>
           <a:p>
             <a:pPr lvl="2"/>
             <a:r>
-              <a:rPr lang="en-US" altLang="zh-TW" smtClean="0"/>
+              <a:rPr lang="en-US" altLang="zh-TW"/>
               <a:t>Third level</a:t>
             </a:r>
           </a:p>
           <a:p>
             <a:pPr lvl="3"/>
             <a:r>
-              <a:rPr lang="en-US" altLang="zh-TW" smtClean="0"/>
+              <a:rPr lang="en-US" altLang="zh-TW"/>
               <a:t>Fourth level</a:t>
             </a:r>
           </a:p>
           <a:p>
             <a:pPr lvl="4"/>
             <a:r>
-              <a:rPr lang="en-US" altLang="zh-TW" smtClean="0"/>
+              <a:rPr lang="en-US" altLang="zh-TW"/>
               <a:t>Fifth level</a:t>
             </a:r>
             <a:endParaRPr lang="zh-TW" altLang="en-US"/>
@@ -1799,7 +1799,7 @@
             <a:fld id="{86B5546F-C09B-4E63-ABC5-F7C86A7E8D66}" type="datetimeFigureOut">
               <a:rPr lang="en-US" smtClean="0"/>
               <a:pPr/>
-              <a:t>6/3/2021</a:t>
+              <a:t>2/27/2026</a:t>
             </a:fld>
             <a:endParaRPr lang="en-US"/>
           </a:p>
@@ -1894,7 +1894,7 @@
           <a:lstStyle/>
           <a:p>
             <a:r>
-              <a:rPr lang="en-US" altLang="zh-TW" smtClean="0"/>
+              <a:rPr lang="en-US" altLang="zh-TW"/>
               <a:t>Click to edit Master title style</a:t>
             </a:r>
             <a:endParaRPr lang="zh-TW" altLang="en-US"/>
@@ -1919,7 +1919,7 @@
             <a:fld id="{86B5546F-C09B-4E63-ABC5-F7C86A7E8D66}" type="datetimeFigureOut">
               <a:rPr lang="en-US" smtClean="0"/>
               <a:pPr/>
-              <a:t>6/3/2021</a:t>
+              <a:t>2/27/2026</a:t>
             </a:fld>
             <a:endParaRPr lang="en-US"/>
           </a:p>
@@ -2016,7 +2016,7 @@
             <a:fld id="{86B5546F-C09B-4E63-ABC5-F7C86A7E8D66}" type="datetimeFigureOut">
               <a:rPr lang="en-US" smtClean="0"/>
               <a:pPr/>
-              <a:t>6/3/2021</a:t>
+              <a:t>2/27/2026</a:t>
             </a:fld>
             <a:endParaRPr lang="en-US"/>
           </a:p>
@@ -2120,7 +2120,7 @@
           </a:lstStyle>
           <a:p>
             <a:r>
-              <a:rPr lang="en-US" altLang="zh-TW" smtClean="0"/>
+              <a:rPr lang="en-US" altLang="zh-TW"/>
               <a:t>Click to edit Master title style</a:t>
             </a:r>
             <a:endParaRPr lang="zh-TW" altLang="en-US"/>
@@ -2177,35 +2177,35 @@
           <a:p>
             <a:pPr lvl="0"/>
             <a:r>
-              <a:rPr lang="en-US" altLang="zh-TW" smtClean="0"/>
+              <a:rPr lang="en-US" altLang="zh-TW"/>
               <a:t>Edit Master text styles</a:t>
             </a:r>
           </a:p>
           <a:p>
             <a:pPr lvl="1"/>
             <a:r>
-              <a:rPr lang="en-US" altLang="zh-TW" smtClean="0"/>
+              <a:rPr lang="en-US" altLang="zh-TW"/>
               <a:t>Second level</a:t>
             </a:r>
           </a:p>
           <a:p>
             <a:pPr lvl="2"/>
             <a:r>
-              <a:rPr lang="en-US" altLang="zh-TW" smtClean="0"/>
+              <a:rPr lang="en-US" altLang="zh-TW"/>
               <a:t>Third level</a:t>
             </a:r>
           </a:p>
           <a:p>
             <a:pPr lvl="3"/>
             <a:r>
-              <a:rPr lang="en-US" altLang="zh-TW" smtClean="0"/>
+              <a:rPr lang="en-US" altLang="zh-TW"/>
               <a:t>Fourth level</a:t>
             </a:r>
           </a:p>
           <a:p>
             <a:pPr lvl="4"/>
             <a:r>
-              <a:rPr lang="en-US" altLang="zh-TW" smtClean="0"/>
+              <a:rPr lang="en-US" altLang="zh-TW"/>
               <a:t>Fifth level</a:t>
             </a:r>
             <a:endParaRPr lang="zh-TW" altLang="en-US"/>
@@ -2271,7 +2271,7 @@
           <a:p>
             <a:pPr lvl="0"/>
             <a:r>
-              <a:rPr lang="en-US" altLang="zh-TW" smtClean="0"/>
+              <a:rPr lang="en-US" altLang="zh-TW"/>
               <a:t>Edit Master text styles</a:t>
             </a:r>
           </a:p>
@@ -2295,7 +2295,7 @@
             <a:fld id="{86B5546F-C09B-4E63-ABC5-F7C86A7E8D66}" type="datetimeFigureOut">
               <a:rPr lang="en-US" smtClean="0"/>
               <a:pPr/>
-              <a:t>6/3/2021</a:t>
+              <a:t>2/27/2026</a:t>
             </a:fld>
             <a:endParaRPr lang="en-US"/>
           </a:p>
@@ -2399,7 +2399,7 @@
           </a:lstStyle>
           <a:p>
             <a:r>
-              <a:rPr lang="en-US" altLang="zh-TW" smtClean="0"/>
+              <a:rPr lang="en-US" altLang="zh-TW"/>
               <a:t>Click to edit Master title style</a:t>
             </a:r>
             <a:endParaRPr lang="zh-TW" altLang="en-US"/>
@@ -2464,7 +2464,7 @@
           </a:lstStyle>
           <a:p>
             <a:r>
-              <a:rPr lang="en-US" altLang="zh-TW" smtClean="0"/>
+              <a:rPr lang="en-US" altLang="zh-TW"/>
               <a:t>Click icon to add picture</a:t>
             </a:r>
             <a:endParaRPr lang="zh-TW" altLang="en-US"/>
@@ -2530,7 +2530,7 @@
           <a:p>
             <a:pPr lvl="0"/>
             <a:r>
-              <a:rPr lang="en-US" altLang="zh-TW" smtClean="0"/>
+              <a:rPr lang="en-US" altLang="zh-TW"/>
               <a:t>Edit Master text styles</a:t>
             </a:r>
           </a:p>
@@ -2554,7 +2554,7 @@
             <a:fld id="{86B5546F-C09B-4E63-ABC5-F7C86A7E8D66}" type="datetimeFigureOut">
               <a:rPr lang="en-US" smtClean="0"/>
               <a:pPr/>
-              <a:t>6/3/2021</a:t>
+              <a:t>2/27/2026</a:t>
             </a:fld>
             <a:endParaRPr lang="en-US"/>
           </a:p>
@@ -2669,10 +2669,9 @@
           <a:lstStyle/>
           <a:p>
             <a:r>
-              <a:rPr lang="zh-TW" altLang="en-US" smtClean="0"/>
+              <a:rPr lang="zh-TW" altLang="en-US"/>
               <a:t>按一下以編輯母片標題樣式</a:t>
             </a:r>
-            <a:endParaRPr lang="zh-TW" altLang="en-US"/>
           </a:p>
         </p:txBody>
       </p:sp>
@@ -2703,38 +2702,37 @@
           <a:p>
             <a:pPr lvl="0"/>
             <a:r>
-              <a:rPr lang="zh-TW" altLang="en-US" smtClean="0"/>
+              <a:rPr lang="zh-TW" altLang="en-US"/>
               <a:t>按一下以編輯母片文字樣式</a:t>
             </a:r>
           </a:p>
           <a:p>
             <a:pPr lvl="1"/>
             <a:r>
-              <a:rPr lang="zh-TW" altLang="en-US" smtClean="0"/>
+              <a:rPr lang="zh-TW" altLang="en-US"/>
               <a:t>第二層</a:t>
             </a:r>
           </a:p>
           <a:p>
             <a:pPr lvl="2"/>
             <a:r>
-              <a:rPr lang="zh-TW" altLang="en-US" smtClean="0"/>
+              <a:rPr lang="zh-TW" altLang="en-US"/>
               <a:t>第三層</a:t>
             </a:r>
           </a:p>
           <a:p>
             <a:pPr lvl="3"/>
             <a:r>
-              <a:rPr lang="zh-TW" altLang="en-US" smtClean="0"/>
+              <a:rPr lang="zh-TW" altLang="en-US"/>
               <a:t>第四層</a:t>
             </a:r>
           </a:p>
           <a:p>
             <a:pPr lvl="4"/>
             <a:r>
-              <a:rPr lang="zh-TW" altLang="en-US" smtClean="0"/>
+              <a:rPr lang="zh-TW" altLang="en-US"/>
               <a:t>第五層</a:t>
             </a:r>
-            <a:endParaRPr lang="zh-TW" altLang="en-US"/>
           </a:p>
         </p:txBody>
       </p:sp>
@@ -2774,7 +2772,7 @@
             <a:fld id="{86B5546F-C09B-4E63-ABC5-F7C86A7E8D66}" type="datetimeFigureOut">
               <a:rPr lang="en-US" smtClean="0"/>
               <a:pPr/>
-              <a:t>6/3/2021</a:t>
+              <a:t>2/27/2026</a:t>
             </a:fld>
             <a:endParaRPr lang="en-US"/>
           </a:p>
@@ -3224,7 +3222,7 @@
           <a:lstStyle/>
           <a:p>
             <a:r>
-              <a:rPr lang="zh-CN" altLang="en-US" b="1" dirty="0" smtClean="0">
+              <a:rPr lang="zh-CN" altLang="en-US" b="1" dirty="0">
                 <a:solidFill>
                   <a:srgbClr val="000066"/>
                 </a:solidFill>
@@ -3234,7 +3232,7 @@
               <a:t>詩</a:t>
             </a:r>
             <a:r>
-              <a:rPr lang="en-US" altLang="zh-CN" b="1" dirty="0" smtClean="0">
+              <a:rPr lang="en-US" altLang="zh-CN" b="1" dirty="0">
                 <a:solidFill>
                   <a:srgbClr val="000066"/>
                 </a:solidFill>
@@ -3254,7 +3252,7 @@
               <a:t>：</a:t>
             </a:r>
             <a:r>
-              <a:rPr lang="en-US" altLang="zh-CN" b="1" dirty="0" smtClean="0">
+              <a:rPr lang="en-US" altLang="zh-CN" b="1" dirty="0">
                 <a:solidFill>
                   <a:srgbClr val="000066"/>
                 </a:solidFill>
@@ -3264,7 +3262,7 @@
               <a:t>1 – 4</a:t>
             </a:r>
             <a:r>
-              <a:rPr lang="zh-CN" altLang="en-US" b="1" dirty="0" smtClean="0">
+              <a:rPr lang="zh-CN" altLang="en-US" b="1" dirty="0">
                 <a:solidFill>
                   <a:srgbClr val="000066"/>
                 </a:solidFill>
@@ -3274,7 +3272,7 @@
               <a:t>，</a:t>
             </a:r>
             <a:r>
-              <a:rPr lang="en-US" altLang="zh-CN" b="1" dirty="0" smtClean="0">
+              <a:rPr lang="en-US" altLang="zh-CN" b="1" dirty="0">
                 <a:solidFill>
                   <a:srgbClr val="000066"/>
                 </a:solidFill>
@@ -3284,7 +3282,7 @@
               <a:t>7 – 12</a:t>
             </a:r>
             <a:r>
-              <a:rPr lang="zh-CN" altLang="en-US" b="1" dirty="0" smtClean="0">
+              <a:rPr lang="zh-CN" altLang="en-US" b="1" dirty="0">
                 <a:solidFill>
                   <a:srgbClr val="000066"/>
                 </a:solidFill>
@@ -3314,7 +3312,7 @@
               <a:t>：</a:t>
             </a:r>
             <a:r>
-              <a:rPr lang="en-US" altLang="zh-CN" b="1" dirty="0" smtClean="0">
+              <a:rPr lang="en-US" altLang="zh-CN" b="1" dirty="0">
                 <a:solidFill>
                   <a:srgbClr val="000066"/>
                 </a:solidFill>
@@ -3338,13 +3336,6 @@
   <p:clrMapOvr>
     <a:masterClrMapping/>
   </p:clrMapOvr>
-  <p:timing>
-    <p:tnLst>
-      <p:par>
-        <p:cTn id="1" dur="indefinite" restart="never" nodeType="tmRoot"/>
-      </p:par>
-    </p:tnLst>
-  </p:timing>
 </p:sld>
 </file>
 
@@ -3426,13 +3417,6 @@
               </a:rPr>
               <a:t> </a:t>
             </a:r>
-            <a:endParaRPr lang="en-US" altLang="zh-TW" sz="6400" b="1" dirty="0" smtClean="0">
-              <a:solidFill>
-                <a:srgbClr val="660033"/>
-              </a:solidFill>
-              <a:latin typeface="微軟正黑體" pitchFamily="34" charset="-120"/>
-              <a:ea typeface="微軟正黑體" pitchFamily="34" charset="-120"/>
-            </a:endParaRPr>
           </a:p>
           <a:p>
             <a:r>
@@ -3465,13 +3449,6 @@
   <p:clrMapOvr>
     <a:masterClrMapping/>
   </p:clrMapOvr>
-  <p:timing>
-    <p:tnLst>
-      <p:par>
-        <p:cTn id="1" dur="indefinite" restart="never" nodeType="tmRoot"/>
-      </p:par>
-    </p:tnLst>
-  </p:timing>
 </p:sld>
 </file>
 
@@ -3515,36 +3492,16 @@
           <a:lstStyle/>
           <a:p>
             <a:r>
-              <a:rPr lang="zh-TW" altLang="en-US" sz="6400" b="1" dirty="0" smtClean="0">
+              <a:rPr lang="zh-TW" altLang="en-US" sz="6400" b="1" dirty="0">
                 <a:solidFill>
                   <a:srgbClr val="660033"/>
                 </a:solidFill>
                 <a:latin typeface="微軟正黑體" pitchFamily="34" charset="-120"/>
                 <a:ea typeface="微軟正黑體" pitchFamily="34" charset="-120"/>
               </a:rPr>
-              <a:t>天</a:t>
-            </a:r>
-            <a:r>
-              <a:rPr lang="zh-TW" altLang="en-US" sz="6400" b="1" dirty="0">
-                <a:solidFill>
-                  <a:srgbClr val="660033"/>
-                </a:solidFill>
-                <a:latin typeface="微軟正黑體" pitchFamily="34" charset="-120"/>
-                <a:ea typeface="微軟正黑體" pitchFamily="34" charset="-120"/>
-              </a:rPr>
-              <a:t>上的天和天上的水，你們都要讚美他</a:t>
-            </a:r>
-            <a:r>
-              <a:rPr lang="zh-TW" altLang="en-US" sz="6400" b="1" dirty="0" smtClean="0">
-                <a:solidFill>
-                  <a:srgbClr val="660033"/>
-                </a:solidFill>
-                <a:latin typeface="微軟正黑體" pitchFamily="34" charset="-120"/>
-                <a:ea typeface="微軟正黑體" pitchFamily="34" charset="-120"/>
-              </a:rPr>
-              <a:t>！</a:t>
-            </a:r>
-            <a:endParaRPr lang="en-US" altLang="zh-TW" sz="6400" b="1" dirty="0" smtClean="0">
+              <a:t>天上的天和天上的水，你們都要讚美他！</a:t>
+            </a:r>
+            <a:endParaRPr lang="en-US" altLang="zh-TW" sz="6400" b="1" dirty="0">
               <a:solidFill>
                 <a:srgbClr val="660033"/>
               </a:solidFill>
@@ -3561,25 +3518,8 @@
                 <a:latin typeface="微軟正黑體" pitchFamily="34" charset="-120"/>
                 <a:ea typeface="微軟正黑體" pitchFamily="34" charset="-120"/>
               </a:rPr>
-              <a:t>所有在地上的，大魚和一切深洋，火與冰雹，雪和霧氣，成就他命的狂</a:t>
-            </a:r>
-            <a:r>
-              <a:rPr lang="zh-TW" altLang="en-US" sz="6400" dirty="0">
-                <a:solidFill>
-                  <a:srgbClr val="660033"/>
-                </a:solidFill>
-                <a:latin typeface="微軟正黑體" pitchFamily="34" charset="-120"/>
-                <a:ea typeface="微軟正黑體" pitchFamily="34" charset="-120"/>
-              </a:rPr>
-              <a:t>風</a:t>
-            </a:r>
-            <a:endParaRPr lang="zh-TW" altLang="en-US" sz="6400" dirty="0">
-              <a:solidFill>
-                <a:srgbClr val="660033"/>
-              </a:solidFill>
-              <a:latin typeface="微軟正黑體" pitchFamily="34" charset="-120"/>
-              <a:ea typeface="微軟正黑體" pitchFamily="34" charset="-120"/>
-            </a:endParaRPr>
+              <a:t>所有在地上的，大魚和一切深洋，火與冰雹，雪和霧氣，成就他命的狂風</a:t>
+            </a:r>
           </a:p>
         </p:txBody>
       </p:sp>
@@ -3593,13 +3533,6 @@
   <p:clrMapOvr>
     <a:masterClrMapping/>
   </p:clrMapOvr>
-  <p:timing>
-    <p:tnLst>
-      <p:par>
-        <p:cTn id="1" dur="indefinite" restart="never" nodeType="tmRoot"/>
-      </p:par>
-    </p:tnLst>
-  </p:timing>
 </p:sld>
 </file>
 
@@ -3672,13 +3605,6 @@
   <p:clrMapOvr>
     <a:masterClrMapping/>
   </p:clrMapOvr>
-  <p:timing>
-    <p:tnLst>
-      <p:par>
-        <p:cTn id="1" dur="indefinite" restart="never" nodeType="tmRoot"/>
-      </p:par>
-    </p:tnLst>
-  </p:timing>
 </p:sld>
 </file>
 
@@ -3754,13 +3680,6 @@
   <p:clrMapOvr>
     <a:masterClrMapping/>
   </p:clrMapOvr>
-  <p:timing>
-    <p:tnLst>
-      <p:par>
-        <p:cTn id="1" dur="indefinite" restart="never" nodeType="tmRoot"/>
-      </p:par>
-    </p:tnLst>
-  </p:timing>
 </p:sld>
 </file>
 
@@ -3855,13 +3774,6 @@
   <p:clrMapOvr>
     <a:masterClrMapping/>
   </p:clrMapOvr>
-  <p:timing>
-    <p:tnLst>
-      <p:par>
-        <p:cTn id="1" dur="indefinite" restart="never" nodeType="tmRoot"/>
-      </p:par>
-    </p:tnLst>
-  </p:timing>
 </p:sld>
 </file>
 
@@ -3937,13 +3849,6 @@
   <p:clrMapOvr>
     <a:masterClrMapping/>
   </p:clrMapOvr>
-  <p:timing>
-    <p:tnLst>
-      <p:par>
-        <p:cTn id="1" dur="indefinite" restart="never" nodeType="tmRoot"/>
-      </p:par>
-    </p:tnLst>
-  </p:timing>
 </p:sld>
 </file>
 
